--- a/Basketball_Assistant_Presentation.pptx
+++ b/Basketball_Assistant_Presentation.pptx
@@ -5284,7 +5284,7 @@
         <p:spPr>
           <a:xfrm>
             <a:off x="731520" y="1463040"/>
-            <a:ext cx="10515600" cy="4572000"/>
+            <a:ext cx="10515600" cy="2041585"/>
           </a:xfrm>
           <a:prstGeom prst="rect">
             <a:avLst/>
@@ -5309,6 +5309,7 @@
               </a:defRPr>
             </a:pPr>
             <a:r>
+              <a:rPr dirty="0"/>
               <a:t>4 basketball leagues (NBA, FIBA, FIBA 3x3, NCAA), each with its own rulebook</a:t>
             </a:r>
           </a:p>
@@ -5325,7 +5326,16 @@
               </a:defRPr>
             </a:pPr>
             <a:r>
-              <a:t>Over 1,000 pages of dense legal-style rule documentation</a:t>
+              <a:rPr dirty="0"/>
+              <a:t>Over </a:t>
+            </a:r>
+            <a:r>
+              <a:rPr lang="en-US" dirty="0"/>
+              <a:t>500</a:t>
+            </a:r>
+            <a:r>
+              <a:rPr dirty="0"/>
+              <a:t> pages of dense legal-style rule documentation</a:t>
             </a:r>
           </a:p>
           <a:p>
@@ -5341,6 +5351,7 @@
               </a:defRPr>
             </a:pPr>
             <a:r>
+              <a:rPr dirty="0"/>
               <a:t>Rules differ across leagues in subtle but critical ways</a:t>
             </a:r>
           </a:p>
@@ -5357,6 +5368,7 @@
               </a:defRPr>
             </a:pPr>
             <a:r>
+              <a:rPr dirty="0"/>
               <a:t>Coaches, referees, and analysts need fast, accurate answers</a:t>
             </a:r>
           </a:p>
@@ -5373,7 +5385,16 @@
               </a:defRPr>
             </a:pPr>
             <a:r>
-              <a:t>Existing tools: Ctrl+F on a PDF</a:t>
+              <a:rPr dirty="0"/>
+              <a:t>Existing tools: </a:t>
+            </a:r>
+            <a:r>
+              <a:rPr dirty="0" err="1"/>
+              <a:t>Ctrl+F</a:t>
+            </a:r>
+            <a:r>
+              <a:rPr dirty="0"/>
+              <a:t> on a PDF</a:t>
             </a:r>
           </a:p>
         </p:txBody>
@@ -7121,7 +7142,7 @@
           </a:bodyPr>
           <a:lstStyle/>
           <a:p>
-            <a:pPr algn="l">
+            <a:pPr>
               <a:defRPr sz="1700" b="0">
                 <a:solidFill>
                   <a:srgbClr val="B0B0B0"/>
@@ -7130,8 +7151,10 @@
               </a:defRPr>
             </a:pPr>
             <a:r>
-              <a:t>cross-encoder/ms-marco-MiniLM-L-6-v2</a:t>
-            </a:r>
+              <a:rPr lang="en-US" sz="1700" dirty="0"/>
+              <a:t>BAAI/bge-reranker-v2-m3.</a:t>
+            </a:r>
+            <a:endParaRPr dirty="0"/>
           </a:p>
         </p:txBody>
       </p:sp>
@@ -9240,7 +9263,7 @@
         <p:spPr>
           <a:xfrm>
             <a:off x="6583680" y="2743200"/>
-            <a:ext cx="4846320" cy="2286000"/>
+            <a:ext cx="4846320" cy="1990288"/>
           </a:xfrm>
           <a:prstGeom prst="rect">
             <a:avLst/>
@@ -9265,6 +9288,7 @@
               </a:defRPr>
             </a:pPr>
             <a:r>
+              <a:rPr dirty="0"/>
               <a:t>Input: player stats (points, rebounds, assists, etc.)</a:t>
             </a:r>
           </a:p>
@@ -9281,6 +9305,7 @@
               </a:defRPr>
             </a:pPr>
             <a:r>
+              <a:rPr dirty="0"/>
               <a:t>Calculates weighted performance score (0-100)</a:t>
             </a:r>
           </a:p>
@@ -9297,6 +9322,7 @@
               </a:defRPr>
             </a:pPr>
             <a:r>
+              <a:rPr dirty="0"/>
               <a:t>Accounts for efficiency, impact, and scoring volume</a:t>
             </a:r>
           </a:p>
@@ -9313,6 +9339,7 @@
               </a:defRPr>
             </a:pPr>
             <a:r>
+              <a:rPr dirty="0"/>
               <a:t>Returns letter grade (A+ through F)</a:t>
             </a:r>
           </a:p>
@@ -9329,8 +9356,28 @@
               </a:defRPr>
             </a:pPr>
             <a:r>
-              <a:t>Compares against league average benchmarks</a:t>
-            </a:r>
+              <a:rPr dirty="0"/>
+              <a:t>Compares against league average benchmark</a:t>
+            </a:r>
+            <a:endParaRPr lang="en-US" dirty="0"/>
+          </a:p>
+          <a:p>
+            <a:pPr>
+              <a:spcAft>
+                <a:spcPts val="800"/>
+              </a:spcAft>
+              <a:defRPr sz="1500">
+                <a:solidFill>
+                  <a:srgbClr val="FFFFFF"/>
+                </a:solidFill>
+                <a:latin typeface="Calibri"/>
+              </a:defRPr>
+            </a:pPr>
+            <a:r>
+              <a:rPr lang="en-US" sz="1500" dirty="0"/>
+              <a:t>John Hollinger formula</a:t>
+            </a:r>
+            <a:endParaRPr dirty="0"/>
           </a:p>
         </p:txBody>
       </p:sp>
